--- a/docs/TasteTailor-Presentation.pptx
+++ b/docs/TasteTailor-Presentation.pptx
@@ -2675,7 +2675,6 @@
                 <a:solidFill>
                   <a:srgbClr val="141814"/>
                 </a:solidFill>
-                <a:latin typeface="Arial" pitchFamily="34" charset="0"/>
                 <a:ea typeface="Arial" pitchFamily="34" charset="-122"/>
                 <a:cs typeface="Arial" pitchFamily="34" charset="-120"/>
               </a:rPr>
@@ -2696,7 +2695,6 @@
                 <a:solidFill>
                   <a:srgbClr val="141814"/>
                 </a:solidFill>
-                <a:latin typeface="Arial" pitchFamily="34" charset="0"/>
                 <a:ea typeface="Arial" pitchFamily="34" charset="-122"/>
                 <a:cs typeface="Arial" pitchFamily="34" charset="-120"/>
               </a:rPr>
@@ -2812,7 +2810,6 @@
                 <a:solidFill>
                   <a:srgbClr val="141814"/>
                 </a:solidFill>
-                <a:latin typeface="Arial" pitchFamily="34" charset="0"/>
                 <a:ea typeface="Arial" pitchFamily="34" charset="-122"/>
                 <a:cs typeface="Arial" pitchFamily="34" charset="-120"/>
               </a:rPr>
@@ -2833,7 +2830,6 @@
                 <a:solidFill>
                   <a:srgbClr val="141814"/>
                 </a:solidFill>
-                <a:latin typeface="Arial" pitchFamily="34" charset="0"/>
                 <a:ea typeface="Arial" pitchFamily="34" charset="-122"/>
                 <a:cs typeface="Arial" pitchFamily="34" charset="-120"/>
               </a:rPr>
@@ -2854,7 +2850,6 @@
                 <a:solidFill>
                   <a:srgbClr val="141814"/>
                 </a:solidFill>
-                <a:latin typeface="Arial" pitchFamily="34" charset="0"/>
                 <a:ea typeface="Arial" pitchFamily="34" charset="-122"/>
                 <a:cs typeface="Arial" pitchFamily="34" charset="-120"/>
               </a:rPr>
@@ -2864,7 +2859,6 @@
               <a:solidFill>
                 <a:srgbClr val="141814"/>
               </a:solidFill>
-              <a:latin typeface="Arial" pitchFamily="34" charset="0"/>
               <a:ea typeface="Arial" pitchFamily="34" charset="-122"/>
               <a:cs typeface="Arial" pitchFamily="34" charset="-120"/>
             </a:endParaRPr>
@@ -4210,30 +4204,16 @@
                 <a:ea typeface="Arial" pitchFamily="34" charset="-122"/>
                 <a:cs typeface="Arial" pitchFamily="34" charset="-120"/>
               </a:rPr>
-              <a:t>Discovered recipes</a:t>
-            </a:r>
-            <a:r>
-              <a:rPr lang="he-IL" sz="1500" dirty="0">
-                <a:solidFill>
-                  <a:srgbClr val="141814"/>
-                </a:solidFill>
-                <a:latin typeface="Arial" pitchFamily="34" charset="0"/>
-                <a:ea typeface="Arial" pitchFamily="34" charset="-122"/>
-                <a:cs typeface="Arial" pitchFamily="34" charset="-120"/>
-              </a:rPr>
-              <a:t> </a:t>
-            </a:r>
-            <a:r>
-              <a:rPr lang="en-GB" sz="1500" dirty="0">
-                <a:solidFill>
-                  <a:srgbClr val="141814"/>
-                </a:solidFill>
-                <a:latin typeface="Arial" pitchFamily="34" charset="0"/>
-                <a:ea typeface="Arial" pitchFamily="34" charset="-122"/>
-                <a:cs typeface="Arial" pitchFamily="34" charset="-120"/>
-              </a:rPr>
-              <a:t>tailored to strict nutritional needs is frustrating.</a:t>
-            </a:r>
+              <a:t>Finding meals tailored to strict nutritional needs is frustrating</a:t>
+            </a:r>
+            <a:endParaRPr lang="he-IL" sz="1500" dirty="0">
+              <a:solidFill>
+                <a:srgbClr val="141814"/>
+              </a:solidFill>
+              <a:latin typeface="Arial" pitchFamily="34" charset="0"/>
+              <a:ea typeface="Arial" pitchFamily="34" charset="-122"/>
+              <a:cs typeface="Arial" pitchFamily="34" charset="-120"/>
+            </a:endParaRPr>
           </a:p>
           <a:p>
             <a:pPr marL="285750" indent="-285750">
@@ -5986,6 +5966,43 @@
               </a:rPr>
               <a:t>Google Gemini — AI provider</a:t>
             </a:r>
+            <a:endParaRPr lang="he-IL" sz="1300" dirty="0">
+              <a:solidFill>
+                <a:srgbClr val="141814"/>
+              </a:solidFill>
+              <a:latin typeface="Arial" pitchFamily="34" charset="0"/>
+              <a:ea typeface="Arial" pitchFamily="34" charset="-122"/>
+              <a:cs typeface="Arial" pitchFamily="34" charset="-120"/>
+            </a:endParaRPr>
+          </a:p>
+          <a:p>
+            <a:pPr marL="342900" indent="-342900">
+              <a:spcAft>
+                <a:spcPts val="600"/>
+              </a:spcAft>
+              <a:buSzPct val="100000"/>
+              <a:buChar char="•"/>
+            </a:pPr>
+            <a:r>
+              <a:rPr lang="en-US" sz="1300" dirty="0" err="1">
+                <a:solidFill>
+                  <a:srgbClr val="141814"/>
+                </a:solidFill>
+                <a:latin typeface="Arial" pitchFamily="34" charset="0"/>
+                <a:cs typeface="Arial" pitchFamily="34" charset="-120"/>
+              </a:rPr>
+              <a:t>Vercel</a:t>
+            </a:r>
+            <a:r>
+              <a:rPr lang="en-US" sz="1300" dirty="0">
+                <a:solidFill>
+                  <a:srgbClr val="141814"/>
+                </a:solidFill>
+                <a:latin typeface="Arial" pitchFamily="34" charset="0"/>
+                <a:cs typeface="Arial" pitchFamily="34" charset="-120"/>
+              </a:rPr>
+              <a:t> - Deployment</a:t>
+            </a:r>
             <a:endParaRPr lang="en-US" sz="1300" dirty="0"/>
           </a:p>
         </p:txBody>
@@ -10354,6 +10371,26 @@
         <p:txBody>
           <a:bodyPr wrap="square" rtlCol="0" anchor="t"/>
           <a:lstStyle/>
+          <a:p>
+            <a:pPr marL="342900" indent="-342900">
+              <a:spcAft>
+                <a:spcPts val="800"/>
+              </a:spcAft>
+              <a:buSzPct val="100000"/>
+              <a:buChar char="•"/>
+            </a:pPr>
+            <a:r>
+              <a:rPr lang="en-US" sz="1500" dirty="0">
+                <a:solidFill>
+                  <a:srgbClr val="141814"/>
+                </a:solidFill>
+                <a:latin typeface="Arial" pitchFamily="34" charset="0"/>
+                <a:ea typeface="Arial" pitchFamily="34" charset="-122"/>
+                <a:cs typeface="Arial" pitchFamily="34" charset="-120"/>
+              </a:rPr>
+              <a:t>https://screenapp.io/app?utm_source=homepage&amp;utm_medium=hero_cta&amp;utm_campaign=user_onboarding&amp;utm_content=primary_cta_button#/library/6a969722e81d530202bc3bf0/recents/184713d2-79fc-4792-b0dd-8c9a94ca6669</a:t>
+            </a:r>
+          </a:p>
           <a:p>
             <a:pPr marL="342900" indent="-342900">
               <a:spcAft>

--- a/docs/TasteTailor-Presentation.pptx
+++ b/docs/TasteTailor-Presentation.pptx
@@ -2700,6 +2700,26 @@
               </a:rPr>
               <a:t>Gemini is a shared external dependency with its own rate limits</a:t>
             </a:r>
+            <a:endParaRPr lang="he-IL" sz="1450" dirty="0">
+              <a:solidFill>
+                <a:srgbClr val="141814"/>
+              </a:solidFill>
+              <a:ea typeface="Arial" pitchFamily="34" charset="-122"/>
+              <a:cs typeface="Arial" pitchFamily="34" charset="-120"/>
+            </a:endParaRPr>
+          </a:p>
+          <a:p>
+            <a:pPr marL="342900" indent="-342900">
+              <a:spcAft>
+                <a:spcPts val="1000"/>
+              </a:spcAft>
+              <a:buSzPct val="100000"/>
+              <a:buChar char="•"/>
+            </a:pPr>
+            <a:r>
+              <a:rPr lang="en-GB" sz="1450" dirty="0"/>
+              <a:t>English-only interface and AI recipe generation</a:t>
+            </a:r>
             <a:endParaRPr lang="en-US" sz="1450" dirty="0"/>
           </a:p>
         </p:txBody>
@@ -2826,16 +2846,10 @@
               <a:buChar char="•"/>
             </a:pPr>
             <a:r>
-              <a:rPr lang="en-US" sz="1450" dirty="0">
-                <a:solidFill>
-                  <a:srgbClr val="141814"/>
-                </a:solidFill>
-                <a:ea typeface="Arial" pitchFamily="34" charset="-122"/>
-                <a:cs typeface="Arial" pitchFamily="34" charset="-120"/>
-              </a:rPr>
-              <a:t>Move AI generation off the synchronous request path</a:t>
-            </a:r>
-            <a:endParaRPr lang="en-US" sz="1450" dirty="0"/>
+              <a:rPr lang="en-GB" sz="1450" dirty="0"/>
+              <a:t>Integrating a high-speed AI model with fewer restrictions.</a:t>
+            </a:r>
+            <a:endParaRPr lang="he-IL" sz="1450" dirty="0"/>
           </a:p>
           <a:p>
             <a:pPr marL="342900" indent="-342900">
@@ -2846,22 +2860,10 @@
               <a:buChar char="•"/>
             </a:pPr>
             <a:r>
-              <a:rPr lang="en-US" sz="1450" dirty="0">
-                <a:solidFill>
-                  <a:srgbClr val="141814"/>
-                </a:solidFill>
-                <a:ea typeface="Arial" pitchFamily="34" charset="-122"/>
-                <a:cs typeface="Arial" pitchFamily="34" charset="-120"/>
-              </a:rPr>
-              <a:t>Production deploy — pending dashboard access, not code</a:t>
-            </a:r>
-            <a:endParaRPr lang="he-IL" sz="1450" dirty="0">
-              <a:solidFill>
-                <a:srgbClr val="141814"/>
-              </a:solidFill>
-              <a:ea typeface="Arial" pitchFamily="34" charset="-122"/>
-              <a:cs typeface="Arial" pitchFamily="34" charset="-120"/>
-            </a:endParaRPr>
+              <a:rPr lang="en-GB" sz="1450" dirty="0"/>
+              <a:t>The platform can expand to a B2B2C model, allowing dietitians and personal trainers to use the tool to tailor recipes for their clients.</a:t>
+            </a:r>
+            <a:endParaRPr lang="he-IL" sz="1450" dirty="0"/>
           </a:p>
           <a:p>
             <a:pPr marL="342900" indent="-342900">
@@ -2873,7 +2875,7 @@
             </a:pPr>
             <a:r>
               <a:rPr lang="en-GB" sz="1450" dirty="0"/>
-              <a:t>The platform can expand to a B2B2C model, allowing dietitians and personal trainers to use the tool to tailor recipes for their clients.</a:t>
+              <a:t>One-click shopping list export to popular online grocery delivery carts</a:t>
             </a:r>
           </a:p>
           <a:p>
@@ -3100,7 +3102,7 @@
               <a:buNone/>
             </a:pPr>
             <a:r>
-              <a:rPr lang="en-US" sz="1600" dirty="0">
+              <a:rPr lang="en-US" sz="1600" dirty="0" err="1">
                 <a:solidFill>
                   <a:srgbClr val="BFC4BC"/>
                 </a:solidFill>
@@ -3108,7 +3110,18 @@
                 <a:ea typeface="Arial" pitchFamily="34" charset="-122"/>
                 <a:cs typeface="Arial" pitchFamily="34" charset="-120"/>
               </a:rPr>
-              <a:t>TasteTailor — Recipes fitted to how you eat.</a:t>
+              <a:t>TasteTailor</a:t>
+            </a:r>
+            <a:r>
+              <a:rPr lang="en-US" sz="1600" dirty="0">
+                <a:solidFill>
+                  <a:srgbClr val="BFC4BC"/>
+                </a:solidFill>
+                <a:latin typeface="Arial" pitchFamily="34" charset="0"/>
+                <a:ea typeface="Arial" pitchFamily="34" charset="-122"/>
+                <a:cs typeface="Arial" pitchFamily="34" charset="-120"/>
+              </a:rPr>
+              <a:t> — Recipes fitted to you.</a:t>
             </a:r>
             <a:endParaRPr lang="en-US" sz="1600" dirty="0"/>
           </a:p>
@@ -3787,118 +3800,6 @@
       </p:sp>
       <p:sp>
         <p:nvSpPr>
-          <p:cNvPr id="19" name="Shape 17"/>
-          <p:cNvSpPr/>
-          <p:nvPr/>
-        </p:nvSpPr>
-        <p:spPr>
-          <a:xfrm>
-            <a:off x="640080" y="5623560"/>
-            <a:ext cx="10881360" cy="658368"/>
-          </a:xfrm>
-          <a:prstGeom prst="roundRect">
-            <a:avLst>
-              <a:gd name="adj" fmla="val 11111"/>
-            </a:avLst>
-          </a:prstGeom>
-          <a:solidFill>
-            <a:srgbClr val="FFFFFF"/>
-          </a:solidFill>
-          <a:ln w="12700">
-            <a:solidFill>
-              <a:srgbClr val="E7DED0"/>
-            </a:solidFill>
-            <a:prstDash val="solid"/>
-          </a:ln>
-        </p:spPr>
-        <p:txBody>
-          <a:bodyPr/>
-          <a:lstStyle/>
-          <a:p>
-            <a:endParaRPr lang="en-GB"/>
-          </a:p>
-        </p:txBody>
-      </p:sp>
-      <p:sp>
-        <p:nvSpPr>
-          <p:cNvPr id="20" name="Text 18"/>
-          <p:cNvSpPr/>
-          <p:nvPr/>
-        </p:nvSpPr>
-        <p:spPr>
-          <a:xfrm>
-            <a:off x="868680" y="5678424"/>
-            <a:ext cx="640080" cy="548640"/>
-          </a:xfrm>
-          <a:prstGeom prst="rect">
-            <a:avLst/>
-          </a:prstGeom>
-          <a:noFill/>
-          <a:ln/>
-        </p:spPr>
-        <p:txBody>
-          <a:bodyPr wrap="square" rtlCol="0" anchor="ctr"/>
-          <a:lstStyle/>
-          <a:p>
-            <a:pPr marL="0" indent="0">
-              <a:buNone/>
-            </a:pPr>
-            <a:r>
-              <a:rPr lang="en-US" sz="1800" b="1" dirty="0">
-                <a:solidFill>
-                  <a:srgbClr val="C84C09"/>
-                </a:solidFill>
-                <a:latin typeface="Georgia" pitchFamily="34" charset="0"/>
-                <a:ea typeface="Georgia" pitchFamily="34" charset="-122"/>
-                <a:cs typeface="Georgia" pitchFamily="34" charset="-120"/>
-              </a:rPr>
-              <a:t>06</a:t>
-            </a:r>
-            <a:endParaRPr lang="en-US" sz="1800" dirty="0"/>
-          </a:p>
-        </p:txBody>
-      </p:sp>
-      <p:sp>
-        <p:nvSpPr>
-          <p:cNvPr id="21" name="Text 19"/>
-          <p:cNvSpPr/>
-          <p:nvPr/>
-        </p:nvSpPr>
-        <p:spPr>
-          <a:xfrm>
-            <a:off x="1554480" y="5678424"/>
-            <a:ext cx="8961120" cy="548640"/>
-          </a:xfrm>
-          <a:prstGeom prst="rect">
-            <a:avLst/>
-          </a:prstGeom>
-          <a:noFill/>
-          <a:ln/>
-        </p:spPr>
-        <p:txBody>
-          <a:bodyPr wrap="square" rtlCol="0" anchor="ctr"/>
-          <a:lstStyle/>
-          <a:p>
-            <a:pPr marL="0" indent="0">
-              <a:buNone/>
-            </a:pPr>
-            <a:r>
-              <a:rPr lang="en-US" sz="1700" dirty="0">
-                <a:solidFill>
-                  <a:srgbClr val="141814"/>
-                </a:solidFill>
-                <a:latin typeface="Arial" pitchFamily="34" charset="0"/>
-                <a:ea typeface="Arial" pitchFamily="34" charset="-122"/>
-                <a:cs typeface="Arial" pitchFamily="34" charset="-120"/>
-              </a:rPr>
-              <a:t>Q&amp;A</a:t>
-            </a:r>
-            <a:endParaRPr lang="en-US" sz="1700" dirty="0"/>
-          </a:p>
-        </p:txBody>
-      </p:sp>
-      <p:sp>
-        <p:nvSpPr>
           <p:cNvPr id="22" name="Text 20"/>
           <p:cNvSpPr/>
           <p:nvPr/>
@@ -10348,258 +10249,6 @@
               <a:t>Live Demo Script</a:t>
             </a:r>
             <a:endParaRPr lang="en-US" sz="3200" dirty="0"/>
-          </a:p>
-        </p:txBody>
-      </p:sp>
-      <p:sp>
-        <p:nvSpPr>
-          <p:cNvPr id="4" name="Text 2"/>
-          <p:cNvSpPr/>
-          <p:nvPr/>
-        </p:nvSpPr>
-        <p:spPr>
-          <a:xfrm>
-            <a:off x="640080" y="1737360"/>
-            <a:ext cx="10881360" cy="4389120"/>
-          </a:xfrm>
-          <a:prstGeom prst="rect">
-            <a:avLst/>
-          </a:prstGeom>
-          <a:noFill/>
-          <a:ln/>
-        </p:spPr>
-        <p:txBody>
-          <a:bodyPr wrap="square" rtlCol="0" anchor="t"/>
-          <a:lstStyle/>
-          <a:p>
-            <a:pPr marL="342900" indent="-342900">
-              <a:spcAft>
-                <a:spcPts val="800"/>
-              </a:spcAft>
-              <a:buSzPct val="100000"/>
-              <a:buChar char="•"/>
-            </a:pPr>
-            <a:r>
-              <a:rPr lang="en-US" sz="1500" dirty="0">
-                <a:solidFill>
-                  <a:srgbClr val="141814"/>
-                </a:solidFill>
-                <a:latin typeface="Arial" pitchFamily="34" charset="0"/>
-                <a:ea typeface="Arial" pitchFamily="34" charset="-122"/>
-                <a:cs typeface="Arial" pitchFamily="34" charset="-120"/>
-              </a:rPr>
-              <a:t>https://screenapp.io/app?utm_source=homepage&amp;utm_medium=hero_cta&amp;utm_campaign=user_onboarding&amp;utm_content=primary_cta_button#/library/6a969722e81d530202bc3bf0/recents/184713d2-79fc-4792-b0dd-8c9a94ca6669</a:t>
-            </a:r>
-          </a:p>
-          <a:p>
-            <a:pPr marL="342900" indent="-342900">
-              <a:spcAft>
-                <a:spcPts val="800"/>
-              </a:spcAft>
-              <a:buSzPct val="100000"/>
-              <a:buChar char="•"/>
-            </a:pPr>
-            <a:r>
-              <a:rPr lang="en-US" sz="1500" dirty="0">
-                <a:solidFill>
-                  <a:srgbClr val="141814"/>
-                </a:solidFill>
-                <a:latin typeface="Arial" pitchFamily="34" charset="0"/>
-                <a:ea typeface="Arial" pitchFamily="34" charset="-122"/>
-                <a:cs typeface="Arial" pitchFamily="34" charset="-120"/>
-              </a:rPr>
-              <a:t>Sign up → onboarding (diet type + allergy)</a:t>
-            </a:r>
-            <a:endParaRPr lang="en-US" sz="1500" dirty="0"/>
-          </a:p>
-          <a:p>
-            <a:pPr marL="342900" indent="-342900">
-              <a:spcAft>
-                <a:spcPts val="800"/>
-              </a:spcAft>
-              <a:buSzPct val="100000"/>
-              <a:buChar char="•"/>
-            </a:pPr>
-            <a:r>
-              <a:rPr lang="en-US" sz="1500" dirty="0">
-                <a:solidFill>
-                  <a:srgbClr val="141814"/>
-                </a:solidFill>
-                <a:latin typeface="Arial" pitchFamily="34" charset="0"/>
-                <a:ea typeface="Arial" pitchFamily="34" charset="-122"/>
-                <a:cs typeface="Arial" pitchFamily="34" charset="-120"/>
-              </a:rPr>
-              <a:t>Generate — adapt mode: paste a recipe, name a known creator</a:t>
-            </a:r>
-            <a:endParaRPr lang="en-US" sz="1500" dirty="0"/>
-          </a:p>
-          <a:p>
-            <a:pPr marL="342900" indent="-342900">
-              <a:spcAft>
-                <a:spcPts val="800"/>
-              </a:spcAft>
-              <a:buSzPct val="100000"/>
-              <a:buChar char="•"/>
-            </a:pPr>
-            <a:r>
-              <a:rPr lang="en-US" sz="1500" dirty="0">
-                <a:solidFill>
-                  <a:srgbClr val="141814"/>
-                </a:solidFill>
-                <a:latin typeface="Arial" pitchFamily="34" charset="0"/>
-                <a:ea typeface="Arial" pitchFamily="34" charset="-122"/>
-                <a:cs typeface="Arial" pitchFamily="34" charset="-120"/>
-              </a:rPr>
-              <a:t>Recipe detail: Insights box explains a substitution; persona-fallback banner if it occurs</a:t>
-            </a:r>
-            <a:endParaRPr lang="en-US" sz="1500" dirty="0"/>
-          </a:p>
-          <a:p>
-            <a:pPr marL="342900" indent="-342900">
-              <a:spcAft>
-                <a:spcPts val="800"/>
-              </a:spcAft>
-              <a:buSzPct val="100000"/>
-              <a:buChar char="•"/>
-            </a:pPr>
-            <a:r>
-              <a:rPr lang="en-US" sz="1500" dirty="0">
-                <a:solidFill>
-                  <a:srgbClr val="141814"/>
-                </a:solidFill>
-                <a:latin typeface="Arial" pitchFamily="34" charset="0"/>
-                <a:ea typeface="Arial" pitchFamily="34" charset="-122"/>
-                <a:cs typeface="Arial" pitchFamily="34" charset="-120"/>
-              </a:rPr>
-              <a:t>Scale servings live, client-side, no reload</a:t>
-            </a:r>
-            <a:endParaRPr lang="en-US" sz="1500" dirty="0"/>
-          </a:p>
-          <a:p>
-            <a:pPr marL="342900" indent="-342900">
-              <a:spcAft>
-                <a:spcPts val="800"/>
-              </a:spcAft>
-              <a:buSzPct val="100000"/>
-              <a:buChar char="•"/>
-            </a:pPr>
-            <a:r>
-              <a:rPr lang="en-US" sz="1500" dirty="0">
-                <a:solidFill>
-                  <a:srgbClr val="141814"/>
-                </a:solidFill>
-                <a:latin typeface="Arial" pitchFamily="34" charset="0"/>
-                <a:ea typeface="Arial" pitchFamily="34" charset="-122"/>
-                <a:cs typeface="Arial" pitchFamily="34" charset="-120"/>
-              </a:rPr>
-              <a:t>Add to shopping list from two recipes → show matching ingredients merge, differing units stay separate</a:t>
-            </a:r>
-            <a:endParaRPr lang="en-US" sz="1500" dirty="0"/>
-          </a:p>
-          <a:p>
-            <a:pPr marL="342900" indent="-342900">
-              <a:spcAft>
-                <a:spcPts val="800"/>
-              </a:spcAft>
-              <a:buSzPct val="100000"/>
-              <a:buChar char="•"/>
-            </a:pPr>
-            <a:r>
-              <a:rPr lang="en-US" sz="1500" dirty="0">
-                <a:solidFill>
-                  <a:srgbClr val="141814"/>
-                </a:solidFill>
-                <a:latin typeface="Arial" pitchFamily="34" charset="0"/>
-                <a:ea typeface="Arial" pitchFamily="34" charset="-122"/>
-                <a:cs typeface="Arial" pitchFamily="34" charset="-120"/>
-              </a:rPr>
-              <a:t>Refine: “make it spicier” → recipe updates in place, chat history preserved</a:t>
-            </a:r>
-            <a:endParaRPr lang="en-US" sz="1500" dirty="0"/>
-          </a:p>
-          <a:p>
-            <a:pPr marL="342900" indent="-342900">
-              <a:spcAft>
-                <a:spcPts val="800"/>
-              </a:spcAft>
-              <a:buSzPct val="100000"/>
-              <a:buChar char="•"/>
-            </a:pPr>
-            <a:r>
-              <a:rPr lang="en-US" sz="1500" dirty="0">
-                <a:solidFill>
-                  <a:srgbClr val="141814"/>
-                </a:solidFill>
-                <a:latin typeface="Arial" pitchFamily="34" charset="0"/>
-                <a:ea typeface="Arial" pitchFamily="34" charset="-122"/>
-                <a:cs typeface="Arial" pitchFamily="34" charset="-120"/>
-              </a:rPr>
-              <a:t>Favorite → filter into Favorites</a:t>
-            </a:r>
-            <a:endParaRPr lang="en-US" sz="1500" dirty="0"/>
-          </a:p>
-          <a:p>
-            <a:pPr marL="342900" indent="-342900">
-              <a:spcAft>
-                <a:spcPts val="800"/>
-              </a:spcAft>
-              <a:buSzPct val="100000"/>
-              <a:buChar char="•"/>
-            </a:pPr>
-            <a:r>
-              <a:rPr lang="en-US" sz="1500" dirty="0">
-                <a:solidFill>
-                  <a:srgbClr val="141814"/>
-                </a:solidFill>
-                <a:latin typeface="Arial" pitchFamily="34" charset="0"/>
-                <a:ea typeface="Arial" pitchFamily="34" charset="-122"/>
-                <a:cs typeface="Arial" pitchFamily="34" charset="-120"/>
-              </a:rPr>
-              <a:t>Cook mode: checklist + print view</a:t>
-            </a:r>
-            <a:endParaRPr lang="en-US" sz="1500" dirty="0"/>
-          </a:p>
-          <a:p>
-            <a:pPr marL="342900" indent="-342900">
-              <a:spcAft>
-                <a:spcPts val="800"/>
-              </a:spcAft>
-              <a:buSzPct val="100000"/>
-              <a:buChar char="•"/>
-            </a:pPr>
-            <a:r>
-              <a:rPr lang="en-US" sz="1500" dirty="0">
-                <a:solidFill>
-                  <a:srgbClr val="141814"/>
-                </a:solidFill>
-                <a:latin typeface="Arial" pitchFamily="34" charset="0"/>
-                <a:ea typeface="Arial" pitchFamily="34" charset="-122"/>
-                <a:cs typeface="Arial" pitchFamily="34" charset="-120"/>
-              </a:rPr>
-              <a:t>Export shopping list to clipboard</a:t>
-            </a:r>
-            <a:endParaRPr lang="en-US" sz="1500" dirty="0"/>
-          </a:p>
-          <a:p>
-            <a:pPr marL="342900" indent="-342900">
-              <a:spcAft>
-                <a:spcPts val="800"/>
-              </a:spcAft>
-              <a:buSzPct val="100000"/>
-              <a:buChar char="•"/>
-            </a:pPr>
-            <a:r>
-              <a:rPr lang="en-US" sz="1500" dirty="0">
-                <a:solidFill>
-                  <a:srgbClr val="141814"/>
-                </a:solidFill>
-                <a:latin typeface="Arial" pitchFamily="34" charset="0"/>
-                <a:ea typeface="Arial" pitchFamily="34" charset="-122"/>
-                <a:cs typeface="Arial" pitchFamily="34" charset="-120"/>
-              </a:rPr>
-              <a:t>(Optional) Second test account → proves it cannot see the first account's data</a:t>
-            </a:r>
-            <a:endParaRPr lang="en-US" sz="1500" dirty="0"/>
           </a:p>
         </p:txBody>
       </p:sp>
